--- a/documentation/My Website.pptx
+++ b/documentation/My Website.pptx
@@ -8,6 +8,9 @@
     <p:sldId id="256" r:id="rId2"/>
     <p:sldId id="257" r:id="rId3"/>
     <p:sldId id="258" r:id="rId4"/>
+    <p:sldId id="259" r:id="rId5"/>
+    <p:sldId id="260" r:id="rId6"/>
+    <p:sldId id="261" r:id="rId7"/>
   </p:sldIdLst>
   <p:sldSz cx="12192000" cy="6858000"/>
   <p:notesSz cx="6858000" cy="9144000"/>
@@ -106,7 +109,125 @@
       </a:defRPr>
     </a:lvl9pPr>
   </p:defaultTextStyle>
+  <p:extLst>
+    <p:ext uri="{EFAFB233-063F-42B5-8137-9DF3F51BA10A}">
+      <p15:sldGuideLst xmlns:p15="http://schemas.microsoft.com/office/powerpoint/2012/main"/>
+    </p:ext>
+  </p:extLst>
 </p:presentation>
+</file>
+
+<file path=ppt/changesInfos/changesInfo1.xml><?xml version="1.0" encoding="utf-8"?>
+<pc:chgInfo xmlns:a="http://schemas.openxmlformats.org/drawingml/2006/main" xmlns:r="http://schemas.openxmlformats.org/officeDocument/2006/relationships" xmlns:ac="http://schemas.microsoft.com/office/drawing/2013/main/command" xmlns:pc="http://schemas.microsoft.com/office/powerpoint/2013/main/command">
+  <pc:docChgLst>
+    <pc:chgData name="Greenhalgh, Camden (gree9076@vandals.uidaho.edu)" userId="5f5f81e4-78a8-4069-ba67-0d4f9c53f0f2" providerId="ADAL" clId="{97E7CD47-F16C-468C-AC17-EFF6A244770F}"/>
+    <pc:docChg chg="custSel addSld modSld">
+      <pc:chgData name="Greenhalgh, Camden (gree9076@vandals.uidaho.edu)" userId="5f5f81e4-78a8-4069-ba67-0d4f9c53f0f2" providerId="ADAL" clId="{97E7CD47-F16C-468C-AC17-EFF6A244770F}" dt="2026-04-28T06:40:11.539" v="936" actId="20577"/>
+      <pc:docMkLst>
+        <pc:docMk/>
+      </pc:docMkLst>
+      <pc:sldChg chg="modSp mod">
+        <pc:chgData name="Greenhalgh, Camden (gree9076@vandals.uidaho.edu)" userId="5f5f81e4-78a8-4069-ba67-0d4f9c53f0f2" providerId="ADAL" clId="{97E7CD47-F16C-468C-AC17-EFF6A244770F}" dt="2026-04-28T06:36:31.413" v="174" actId="20577"/>
+        <pc:sldMkLst>
+          <pc:docMk/>
+          <pc:sldMk cId="2867609856" sldId="257"/>
+        </pc:sldMkLst>
+        <pc:spChg chg="mod">
+          <ac:chgData name="Greenhalgh, Camden (gree9076@vandals.uidaho.edu)" userId="5f5f81e4-78a8-4069-ba67-0d4f9c53f0f2" providerId="ADAL" clId="{97E7CD47-F16C-468C-AC17-EFF6A244770F}" dt="2026-04-28T06:36:31.413" v="174" actId="20577"/>
+          <ac:spMkLst>
+            <pc:docMk/>
+            <pc:sldMk cId="2867609856" sldId="257"/>
+            <ac:spMk id="3" creationId="{4D6D263A-01C6-C739-5197-957C608ACCD9}"/>
+          </ac:spMkLst>
+        </pc:spChg>
+      </pc:sldChg>
+      <pc:sldChg chg="modSp mod">
+        <pc:chgData name="Greenhalgh, Camden (gree9076@vandals.uidaho.edu)" userId="5f5f81e4-78a8-4069-ba67-0d4f9c53f0f2" providerId="ADAL" clId="{97E7CD47-F16C-468C-AC17-EFF6A244770F}" dt="2026-04-28T06:37:38.773" v="363" actId="20577"/>
+        <pc:sldMkLst>
+          <pc:docMk/>
+          <pc:sldMk cId="101426919" sldId="258"/>
+        </pc:sldMkLst>
+        <pc:spChg chg="mod">
+          <ac:chgData name="Greenhalgh, Camden (gree9076@vandals.uidaho.edu)" userId="5f5f81e4-78a8-4069-ba67-0d4f9c53f0f2" providerId="ADAL" clId="{97E7CD47-F16C-468C-AC17-EFF6A244770F}" dt="2026-04-28T06:37:38.773" v="363" actId="20577"/>
+          <ac:spMkLst>
+            <pc:docMk/>
+            <pc:sldMk cId="101426919" sldId="258"/>
+            <ac:spMk id="3" creationId="{16562AFF-7D9B-1A05-DE88-BF9CB8BA3CBA}"/>
+          </ac:spMkLst>
+        </pc:spChg>
+      </pc:sldChg>
+      <pc:sldChg chg="modSp new mod">
+        <pc:chgData name="Greenhalgh, Camden (gree9076@vandals.uidaho.edu)" userId="5f5f81e4-78a8-4069-ba67-0d4f9c53f0f2" providerId="ADAL" clId="{97E7CD47-F16C-468C-AC17-EFF6A244770F}" dt="2026-04-28T06:38:46.957" v="620" actId="20577"/>
+        <pc:sldMkLst>
+          <pc:docMk/>
+          <pc:sldMk cId="3840658842" sldId="259"/>
+        </pc:sldMkLst>
+        <pc:spChg chg="mod">
+          <ac:chgData name="Greenhalgh, Camden (gree9076@vandals.uidaho.edu)" userId="5f5f81e4-78a8-4069-ba67-0d4f9c53f0f2" providerId="ADAL" clId="{97E7CD47-F16C-468C-AC17-EFF6A244770F}" dt="2026-04-28T06:37:50.043" v="374" actId="20577"/>
+          <ac:spMkLst>
+            <pc:docMk/>
+            <pc:sldMk cId="3840658842" sldId="259"/>
+            <ac:spMk id="2" creationId="{7A20A436-C362-9D45-86B5-1B156AB20091}"/>
+          </ac:spMkLst>
+        </pc:spChg>
+        <pc:spChg chg="mod">
+          <ac:chgData name="Greenhalgh, Camden (gree9076@vandals.uidaho.edu)" userId="5f5f81e4-78a8-4069-ba67-0d4f9c53f0f2" providerId="ADAL" clId="{97E7CD47-F16C-468C-AC17-EFF6A244770F}" dt="2026-04-28T06:38:46.957" v="620" actId="20577"/>
+          <ac:spMkLst>
+            <pc:docMk/>
+            <pc:sldMk cId="3840658842" sldId="259"/>
+            <ac:spMk id="3" creationId="{4A351CC1-77C8-9D26-E7DB-8E6FDEBF5653}"/>
+          </ac:spMkLst>
+        </pc:spChg>
+      </pc:sldChg>
+      <pc:sldChg chg="modSp new mod">
+        <pc:chgData name="Greenhalgh, Camden (gree9076@vandals.uidaho.edu)" userId="5f5f81e4-78a8-4069-ba67-0d4f9c53f0f2" providerId="ADAL" clId="{97E7CD47-F16C-468C-AC17-EFF6A244770F}" dt="2026-04-28T06:39:10.597" v="697" actId="20577"/>
+        <pc:sldMkLst>
+          <pc:docMk/>
+          <pc:sldMk cId="1622488372" sldId="260"/>
+        </pc:sldMkLst>
+        <pc:spChg chg="mod">
+          <ac:chgData name="Greenhalgh, Camden (gree9076@vandals.uidaho.edu)" userId="5f5f81e4-78a8-4069-ba67-0d4f9c53f0f2" providerId="ADAL" clId="{97E7CD47-F16C-468C-AC17-EFF6A244770F}" dt="2026-04-28T06:38:55.452" v="627" actId="20577"/>
+          <ac:spMkLst>
+            <pc:docMk/>
+            <pc:sldMk cId="1622488372" sldId="260"/>
+            <ac:spMk id="2" creationId="{07AAB0B6-44E0-59F3-A47E-84833AF10A0E}"/>
+          </ac:spMkLst>
+        </pc:spChg>
+        <pc:spChg chg="mod">
+          <ac:chgData name="Greenhalgh, Camden (gree9076@vandals.uidaho.edu)" userId="5f5f81e4-78a8-4069-ba67-0d4f9c53f0f2" providerId="ADAL" clId="{97E7CD47-F16C-468C-AC17-EFF6A244770F}" dt="2026-04-28T06:39:10.597" v="697" actId="20577"/>
+          <ac:spMkLst>
+            <pc:docMk/>
+            <pc:sldMk cId="1622488372" sldId="260"/>
+            <ac:spMk id="3" creationId="{B3440D6F-F165-7C37-862C-1DAA9DB9648C}"/>
+          </ac:spMkLst>
+        </pc:spChg>
+      </pc:sldChg>
+      <pc:sldChg chg="modSp new mod">
+        <pc:chgData name="Greenhalgh, Camden (gree9076@vandals.uidaho.edu)" userId="5f5f81e4-78a8-4069-ba67-0d4f9c53f0f2" providerId="ADAL" clId="{97E7CD47-F16C-468C-AC17-EFF6A244770F}" dt="2026-04-28T06:40:11.539" v="936" actId="20577"/>
+        <pc:sldMkLst>
+          <pc:docMk/>
+          <pc:sldMk cId="361863829" sldId="261"/>
+        </pc:sldMkLst>
+        <pc:spChg chg="mod">
+          <ac:chgData name="Greenhalgh, Camden (gree9076@vandals.uidaho.edu)" userId="5f5f81e4-78a8-4069-ba67-0d4f9c53f0f2" providerId="ADAL" clId="{97E7CD47-F16C-468C-AC17-EFF6A244770F}" dt="2026-04-28T06:39:19.203" v="719" actId="20577"/>
+          <ac:spMkLst>
+            <pc:docMk/>
+            <pc:sldMk cId="361863829" sldId="261"/>
+            <ac:spMk id="2" creationId="{5424CC0B-7DED-BFC9-1138-63C2030961F8}"/>
+          </ac:spMkLst>
+        </pc:spChg>
+        <pc:spChg chg="mod">
+          <ac:chgData name="Greenhalgh, Camden (gree9076@vandals.uidaho.edu)" userId="5f5f81e4-78a8-4069-ba67-0d4f9c53f0f2" providerId="ADAL" clId="{97E7CD47-F16C-468C-AC17-EFF6A244770F}" dt="2026-04-28T06:40:11.539" v="936" actId="20577"/>
+          <ac:spMkLst>
+            <pc:docMk/>
+            <pc:sldMk cId="361863829" sldId="261"/>
+            <ac:spMk id="3" creationId="{25B6BE50-89FF-AE83-6569-A0632FC6BCC8}"/>
+          </ac:spMkLst>
+        </pc:spChg>
+      </pc:sldChg>
+    </pc:docChg>
+  </pc:docChgLst>
+</pc:chgInfo>
 </file>
 
 <file path=ppt/slideLayouts/slideLayout1.xml><?xml version="1.0" encoding="utf-8"?>
@@ -256,7 +377,7 @@
           <a:p>
             <a:fld id="{1948562B-C0F0-4A7D-88E5-5724A6235669}" type="datetimeFigureOut">
               <a:rPr lang="en-US" smtClean="0"/>
-              <a:t>3/23/2026</a:t>
+              <a:t>4/27/2026</a:t>
             </a:fld>
             <a:endParaRPr lang="en-US"/>
           </a:p>
@@ -454,7 +575,7 @@
           <a:p>
             <a:fld id="{1948562B-C0F0-4A7D-88E5-5724A6235669}" type="datetimeFigureOut">
               <a:rPr lang="en-US" smtClean="0"/>
-              <a:t>3/23/2026</a:t>
+              <a:t>4/27/2026</a:t>
             </a:fld>
             <a:endParaRPr lang="en-US"/>
           </a:p>
@@ -662,7 +783,7 @@
           <a:p>
             <a:fld id="{1948562B-C0F0-4A7D-88E5-5724A6235669}" type="datetimeFigureOut">
               <a:rPr lang="en-US" smtClean="0"/>
-              <a:t>3/23/2026</a:t>
+              <a:t>4/27/2026</a:t>
             </a:fld>
             <a:endParaRPr lang="en-US"/>
           </a:p>
@@ -860,7 +981,7 @@
           <a:p>
             <a:fld id="{1948562B-C0F0-4A7D-88E5-5724A6235669}" type="datetimeFigureOut">
               <a:rPr lang="en-US" smtClean="0"/>
-              <a:t>3/23/2026</a:t>
+              <a:t>4/27/2026</a:t>
             </a:fld>
             <a:endParaRPr lang="en-US"/>
           </a:p>
@@ -1135,7 +1256,7 @@
           <a:p>
             <a:fld id="{1948562B-C0F0-4A7D-88E5-5724A6235669}" type="datetimeFigureOut">
               <a:rPr lang="en-US" smtClean="0"/>
-              <a:t>3/23/2026</a:t>
+              <a:t>4/27/2026</a:t>
             </a:fld>
             <a:endParaRPr lang="en-US"/>
           </a:p>
@@ -1400,7 +1521,7 @@
           <a:p>
             <a:fld id="{1948562B-C0F0-4A7D-88E5-5724A6235669}" type="datetimeFigureOut">
               <a:rPr lang="en-US" smtClean="0"/>
-              <a:t>3/23/2026</a:t>
+              <a:t>4/27/2026</a:t>
             </a:fld>
             <a:endParaRPr lang="en-US"/>
           </a:p>
@@ -1812,7 +1933,7 @@
           <a:p>
             <a:fld id="{1948562B-C0F0-4A7D-88E5-5724A6235669}" type="datetimeFigureOut">
               <a:rPr lang="en-US" smtClean="0"/>
-              <a:t>3/23/2026</a:t>
+              <a:t>4/27/2026</a:t>
             </a:fld>
             <a:endParaRPr lang="en-US"/>
           </a:p>
@@ -1953,7 +2074,7 @@
           <a:p>
             <a:fld id="{1948562B-C0F0-4A7D-88E5-5724A6235669}" type="datetimeFigureOut">
               <a:rPr lang="en-US" smtClean="0"/>
-              <a:t>3/23/2026</a:t>
+              <a:t>4/27/2026</a:t>
             </a:fld>
             <a:endParaRPr lang="en-US"/>
           </a:p>
@@ -2066,7 +2187,7 @@
           <a:p>
             <a:fld id="{1948562B-C0F0-4A7D-88E5-5724A6235669}" type="datetimeFigureOut">
               <a:rPr lang="en-US" smtClean="0"/>
-              <a:t>3/23/2026</a:t>
+              <a:t>4/27/2026</a:t>
             </a:fld>
             <a:endParaRPr lang="en-US"/>
           </a:p>
@@ -2377,7 +2498,7 @@
           <a:p>
             <a:fld id="{1948562B-C0F0-4A7D-88E5-5724A6235669}" type="datetimeFigureOut">
               <a:rPr lang="en-US" smtClean="0"/>
-              <a:t>3/23/2026</a:t>
+              <a:t>4/27/2026</a:t>
             </a:fld>
             <a:endParaRPr lang="en-US"/>
           </a:p>
@@ -2665,7 +2786,7 @@
           <a:p>
             <a:fld id="{1948562B-C0F0-4A7D-88E5-5724A6235669}" type="datetimeFigureOut">
               <a:rPr lang="en-US" smtClean="0"/>
-              <a:t>3/23/2026</a:t>
+              <a:t>4/27/2026</a:t>
             </a:fld>
             <a:endParaRPr lang="en-US"/>
           </a:p>
@@ -2906,7 +3027,7 @@
           <a:p>
             <a:fld id="{1948562B-C0F0-4A7D-88E5-5724A6235669}" type="datetimeFigureOut">
               <a:rPr lang="en-US" smtClean="0"/>
-              <a:t>3/23/2026</a:t>
+              <a:t>4/27/2026</a:t>
             </a:fld>
             <a:endParaRPr lang="en-US"/>
           </a:p>
@@ -3460,13 +3581,13 @@
           <a:p>
             <a:r>
               <a:rPr lang="en-US" dirty="0"/>
-              <a:t>I am going to convert my Personal Website from the lab assignments into a full website.</a:t>
+              <a:t>I converted one of my assignments from the lab into a dynamic database.</a:t>
             </a:r>
           </a:p>
           <a:p>
             <a:r>
               <a:rPr lang="en-US" dirty="0"/>
-              <a:t>I plan on converting it into a full website that can keep track of my book recommendations that I can update with a form instead of editing the code</a:t>
+              <a:t>I did this because I didn’t really have any better ideas because I had a lot of work at the time.</a:t>
             </a:r>
           </a:p>
           <a:p>
@@ -3555,13 +3676,33 @@
           <a:p>
             <a:r>
               <a:rPr lang="en-US" dirty="0"/>
-              <a:t>I don’t currently have a database, but I plan on adding a database for book recommendations</a:t>
+              <a:t>The database contains 2 tables at the moment.</a:t>
             </a:r>
           </a:p>
           <a:p>
             <a:r>
               <a:rPr lang="en-US" dirty="0"/>
-              <a:t>As well as a way of logging in remotely</a:t>
+              <a:t>Pets</a:t>
+            </a:r>
+          </a:p>
+          <a:p>
+            <a:pPr lvl="1"/>
+            <a:r>
+              <a:rPr lang="en-US" dirty="0"/>
+              <a:t>Which stores the name and images of my pets.</a:t>
+            </a:r>
+          </a:p>
+          <a:p>
+            <a:r>
+              <a:rPr lang="en-US" dirty="0"/>
+              <a:t>Books</a:t>
+            </a:r>
+          </a:p>
+          <a:p>
+            <a:pPr lvl="1"/>
+            <a:r>
+              <a:rPr lang="en-US" dirty="0"/>
+              <a:t>Which stores information on books I like</a:t>
             </a:r>
           </a:p>
         </p:txBody>
@@ -3570,6 +3711,290 @@
     <p:extLst>
       <p:ext uri="{BB962C8B-B14F-4D97-AF65-F5344CB8AC3E}">
         <p14:creationId xmlns:p14="http://schemas.microsoft.com/office/powerpoint/2010/main" val="101426919"/>
+      </p:ext>
+    </p:extLst>
+  </p:cSld>
+  <p:clrMapOvr>
+    <a:masterClrMapping/>
+  </p:clrMapOvr>
+</p:sld>
+</file>
+
+<file path=ppt/slides/slide4.xml><?xml version="1.0" encoding="utf-8"?>
+<p:sld xmlns:a="http://schemas.openxmlformats.org/drawingml/2006/main" xmlns:r="http://schemas.openxmlformats.org/officeDocument/2006/relationships" xmlns:p="http://schemas.openxmlformats.org/presentationml/2006/main">
+  <p:cSld>
+    <p:spTree>
+      <p:nvGrpSpPr>
+        <p:cNvPr id="1" name=""/>
+        <p:cNvGrpSpPr/>
+        <p:nvPr/>
+      </p:nvGrpSpPr>
+      <p:grpSpPr>
+        <a:xfrm>
+          <a:off x="0" y="0"/>
+          <a:ext cx="0" cy="0"/>
+          <a:chOff x="0" y="0"/>
+          <a:chExt cx="0" cy="0"/>
+        </a:xfrm>
+      </p:grpSpPr>
+      <p:sp>
+        <p:nvSpPr>
+          <p:cNvPr id="2" name="Title 1">
+            <a:extLst>
+              <a:ext uri="{FF2B5EF4-FFF2-40B4-BE49-F238E27FC236}">
+                <a16:creationId xmlns:a16="http://schemas.microsoft.com/office/drawing/2014/main" id="{7A20A436-C362-9D45-86B5-1B156AB20091}"/>
+              </a:ext>
+            </a:extLst>
+          </p:cNvPr>
+          <p:cNvSpPr>
+            <a:spLocks noGrp="1"/>
+          </p:cNvSpPr>
+          <p:nvPr>
+            <p:ph type="title"/>
+          </p:nvPr>
+        </p:nvSpPr>
+        <p:spPr/>
+        <p:txBody>
+          <a:bodyPr/>
+          <a:lstStyle/>
+          <a:p>
+            <a:r>
+              <a:rPr lang="en-US" dirty="0"/>
+              <a:t>Web server</a:t>
+            </a:r>
+          </a:p>
+        </p:txBody>
+      </p:sp>
+      <p:sp>
+        <p:nvSpPr>
+          <p:cNvPr id="3" name="Content Placeholder 2">
+            <a:extLst>
+              <a:ext uri="{FF2B5EF4-FFF2-40B4-BE49-F238E27FC236}">
+                <a16:creationId xmlns:a16="http://schemas.microsoft.com/office/drawing/2014/main" id="{4A351CC1-77C8-9D26-E7DB-8E6FDEBF5653}"/>
+              </a:ext>
+            </a:extLst>
+          </p:cNvPr>
+          <p:cNvSpPr>
+            <a:spLocks noGrp="1"/>
+          </p:cNvSpPr>
+          <p:nvPr>
+            <p:ph idx="1"/>
+          </p:nvPr>
+        </p:nvSpPr>
+        <p:spPr/>
+        <p:txBody>
+          <a:bodyPr/>
+          <a:lstStyle/>
+          <a:p>
+            <a:r>
+              <a:rPr lang="en-US" dirty="0"/>
+              <a:t>I used express.js, since it’s simple setup allowed me to convert a previously static website into a dynamic webapp without refactoring everything</a:t>
+            </a:r>
+          </a:p>
+          <a:p>
+            <a:r>
+              <a:rPr lang="en-US" dirty="0"/>
+              <a:t>Additionally, it has a super simple and convenient web interface.</a:t>
+            </a:r>
+          </a:p>
+        </p:txBody>
+      </p:sp>
+    </p:spTree>
+    <p:extLst>
+      <p:ext uri="{BB962C8B-B14F-4D97-AF65-F5344CB8AC3E}">
+        <p14:creationId xmlns:p14="http://schemas.microsoft.com/office/powerpoint/2010/main" val="3840658842"/>
+      </p:ext>
+    </p:extLst>
+  </p:cSld>
+  <p:clrMapOvr>
+    <a:masterClrMapping/>
+  </p:clrMapOvr>
+</p:sld>
+</file>
+
+<file path=ppt/slides/slide5.xml><?xml version="1.0" encoding="utf-8"?>
+<p:sld xmlns:a="http://schemas.openxmlformats.org/drawingml/2006/main" xmlns:r="http://schemas.openxmlformats.org/officeDocument/2006/relationships" xmlns:p="http://schemas.openxmlformats.org/presentationml/2006/main">
+  <p:cSld>
+    <p:spTree>
+      <p:nvGrpSpPr>
+        <p:cNvPr id="1" name=""/>
+        <p:cNvGrpSpPr/>
+        <p:nvPr/>
+      </p:nvGrpSpPr>
+      <p:grpSpPr>
+        <a:xfrm>
+          <a:off x="0" y="0"/>
+          <a:ext cx="0" cy="0"/>
+          <a:chOff x="0" y="0"/>
+          <a:chExt cx="0" cy="0"/>
+        </a:xfrm>
+      </p:grpSpPr>
+      <p:sp>
+        <p:nvSpPr>
+          <p:cNvPr id="2" name="Title 1">
+            <a:extLst>
+              <a:ext uri="{FF2B5EF4-FFF2-40B4-BE49-F238E27FC236}">
+                <a16:creationId xmlns:a16="http://schemas.microsoft.com/office/drawing/2014/main" id="{07AAB0B6-44E0-59F3-A47E-84833AF10A0E}"/>
+              </a:ext>
+            </a:extLst>
+          </p:cNvPr>
+          <p:cNvSpPr>
+            <a:spLocks noGrp="1"/>
+          </p:cNvSpPr>
+          <p:nvPr>
+            <p:ph type="title"/>
+          </p:nvPr>
+        </p:nvSpPr>
+        <p:spPr/>
+        <p:txBody>
+          <a:bodyPr/>
+          <a:lstStyle/>
+          <a:p>
+            <a:r>
+              <a:rPr lang="en-US" dirty="0"/>
+              <a:t>CRUD</a:t>
+            </a:r>
+          </a:p>
+        </p:txBody>
+      </p:sp>
+      <p:sp>
+        <p:nvSpPr>
+          <p:cNvPr id="3" name="Content Placeholder 2">
+            <a:extLst>
+              <a:ext uri="{FF2B5EF4-FFF2-40B4-BE49-F238E27FC236}">
+                <a16:creationId xmlns:a16="http://schemas.microsoft.com/office/drawing/2014/main" id="{B3440D6F-F165-7C37-862C-1DAA9DB9648C}"/>
+              </a:ext>
+            </a:extLst>
+          </p:cNvPr>
+          <p:cNvSpPr>
+            <a:spLocks noGrp="1"/>
+          </p:cNvSpPr>
+          <p:nvPr>
+            <p:ph idx="1"/>
+          </p:nvPr>
+        </p:nvSpPr>
+        <p:spPr/>
+        <p:txBody>
+          <a:bodyPr/>
+          <a:lstStyle/>
+          <a:p>
+            <a:r>
+              <a:rPr lang="en-US" dirty="0"/>
+              <a:t>The admin page is capable of CRUD interaction.</a:t>
+            </a:r>
+          </a:p>
+        </p:txBody>
+      </p:sp>
+    </p:spTree>
+    <p:extLst>
+      <p:ext uri="{BB962C8B-B14F-4D97-AF65-F5344CB8AC3E}">
+        <p14:creationId xmlns:p14="http://schemas.microsoft.com/office/powerpoint/2010/main" val="1622488372"/>
+      </p:ext>
+    </p:extLst>
+  </p:cSld>
+  <p:clrMapOvr>
+    <a:masterClrMapping/>
+  </p:clrMapOvr>
+</p:sld>
+</file>
+
+<file path=ppt/slides/slide6.xml><?xml version="1.0" encoding="utf-8"?>
+<p:sld xmlns:a="http://schemas.openxmlformats.org/drawingml/2006/main" xmlns:r="http://schemas.openxmlformats.org/officeDocument/2006/relationships" xmlns:p="http://schemas.openxmlformats.org/presentationml/2006/main">
+  <p:cSld>
+    <p:spTree>
+      <p:nvGrpSpPr>
+        <p:cNvPr id="1" name=""/>
+        <p:cNvGrpSpPr/>
+        <p:nvPr/>
+      </p:nvGrpSpPr>
+      <p:grpSpPr>
+        <a:xfrm>
+          <a:off x="0" y="0"/>
+          <a:ext cx="0" cy="0"/>
+          <a:chOff x="0" y="0"/>
+          <a:chExt cx="0" cy="0"/>
+        </a:xfrm>
+      </p:grpSpPr>
+      <p:sp>
+        <p:nvSpPr>
+          <p:cNvPr id="2" name="Title 1">
+            <a:extLst>
+              <a:ext uri="{FF2B5EF4-FFF2-40B4-BE49-F238E27FC236}">
+                <a16:creationId xmlns:a16="http://schemas.microsoft.com/office/drawing/2014/main" id="{5424CC0B-7DED-BFC9-1138-63C2030961F8}"/>
+              </a:ext>
+            </a:extLst>
+          </p:cNvPr>
+          <p:cNvSpPr>
+            <a:spLocks noGrp="1"/>
+          </p:cNvSpPr>
+          <p:nvPr>
+            <p:ph type="title"/>
+          </p:nvPr>
+        </p:nvSpPr>
+        <p:spPr/>
+        <p:txBody>
+          <a:bodyPr/>
+          <a:lstStyle/>
+          <a:p>
+            <a:r>
+              <a:rPr lang="en-US" dirty="0"/>
+              <a:t>Things I could change</a:t>
+            </a:r>
+          </a:p>
+        </p:txBody>
+      </p:sp>
+      <p:sp>
+        <p:nvSpPr>
+          <p:cNvPr id="3" name="Content Placeholder 2">
+            <a:extLst>
+              <a:ext uri="{FF2B5EF4-FFF2-40B4-BE49-F238E27FC236}">
+                <a16:creationId xmlns:a16="http://schemas.microsoft.com/office/drawing/2014/main" id="{25B6BE50-89FF-AE83-6569-A0632FC6BCC8}"/>
+              </a:ext>
+            </a:extLst>
+          </p:cNvPr>
+          <p:cNvSpPr>
+            <a:spLocks noGrp="1"/>
+          </p:cNvSpPr>
+          <p:nvPr>
+            <p:ph idx="1"/>
+          </p:nvPr>
+        </p:nvSpPr>
+        <p:spPr/>
+        <p:txBody>
+          <a:bodyPr/>
+          <a:lstStyle/>
+          <a:p>
+            <a:r>
+              <a:rPr lang="en-US" dirty="0"/>
+              <a:t>Add a login system.</a:t>
+            </a:r>
+          </a:p>
+          <a:p>
+            <a:pPr lvl="1"/>
+            <a:r>
+              <a:rPr lang="en-US" dirty="0"/>
+              <a:t>Right now, anyone can login and add info if they wanted to.</a:t>
+            </a:r>
+          </a:p>
+          <a:p>
+            <a:r>
+              <a:rPr lang="en-US" dirty="0"/>
+              <a:t>Add a way to upload NEW images</a:t>
+            </a:r>
+          </a:p>
+          <a:p>
+            <a:pPr lvl="1"/>
+            <a:r>
+              <a:rPr lang="en-US" dirty="0"/>
+              <a:t>I can only use images that I’ve hardcoded right now.</a:t>
+            </a:r>
+          </a:p>
+        </p:txBody>
+      </p:sp>
+    </p:spTree>
+    <p:extLst>
+      <p:ext uri="{BB962C8B-B14F-4D97-AF65-F5344CB8AC3E}">
+        <p14:creationId xmlns:p14="http://schemas.microsoft.com/office/powerpoint/2010/main" val="361863829"/>
       </p:ext>
     </p:extLst>
   </p:cSld>
